--- a/Contragenti-1.3-Projects-RU.pptx
+++ b/Contragenti-1.3-Projects-RU.pptx
@@ -3779,8 +3779,8 @@
         </p:nvSpPr>
         <p:spPr>
           <a:xfrm>
-            <a:off x="603504" y="1417320"/>
-            <a:ext cx="822960" cy="566928"/>
+            <a:off x="658368" y="1417320"/>
+            <a:ext cx="749808" cy="566928"/>
           </a:xfrm>
           <a:prstGeom prst="rect">
             <a:avLst/>
@@ -3796,7 +3796,7 @@
               <a:buNone/>
             </a:pPr>
             <a:r>
-              <a:rPr lang="en-US" sz="850" b="1" dirty="0">
+              <a:rPr lang="en-US" sz="900" b="1" dirty="0">
                 <a:solidFill>
                   <a:srgbClr val="FFFFFF"/>
                 </a:solidFill>
@@ -3806,7 +3806,7 @@
               </a:rPr>
               <a:t>Тендер</a:t>
             </a:r>
-            <a:endParaRPr lang="en-US" sz="850" dirty="0"/>
+            <a:endParaRPr lang="en-US" sz="900" dirty="0"/>
           </a:p>
         </p:txBody>
       </p:sp>
@@ -3843,8 +3843,8 @@
         </p:nvSpPr>
         <p:spPr>
           <a:xfrm>
-            <a:off x="1673352" y="1417320"/>
-            <a:ext cx="822960" cy="566928"/>
+            <a:off x="1728216" y="1417320"/>
+            <a:ext cx="749808" cy="566928"/>
           </a:xfrm>
           <a:prstGeom prst="rect">
             <a:avLst/>
@@ -3860,7 +3860,7 @@
               <a:buNone/>
             </a:pPr>
             <a:r>
-              <a:rPr lang="en-US" sz="850" b="1" dirty="0">
+              <a:rPr lang="en-US" sz="900" b="1" dirty="0">
                 <a:solidFill>
                   <a:srgbClr val="FFFFFF"/>
                 </a:solidFill>
@@ -3870,7 +3870,7 @@
               </a:rPr>
               <a:t>Договор</a:t>
             </a:r>
-            <a:endParaRPr lang="en-US" sz="850" dirty="0"/>
+            <a:endParaRPr lang="en-US" sz="900" dirty="0"/>
           </a:p>
         </p:txBody>
       </p:sp>
@@ -3907,8 +3907,8 @@
         </p:nvSpPr>
         <p:spPr>
           <a:xfrm>
-            <a:off x="2743200" y="1417320"/>
-            <a:ext cx="822960" cy="566928"/>
+            <a:off x="2798064" y="1417320"/>
+            <a:ext cx="749808" cy="566928"/>
           </a:xfrm>
           <a:prstGeom prst="rect">
             <a:avLst/>
@@ -3924,7 +3924,7 @@
               <a:buNone/>
             </a:pPr>
             <a:r>
-              <a:rPr lang="en-US" sz="850" b="1" dirty="0">
+              <a:rPr lang="en-US" sz="900" b="1" dirty="0">
                 <a:solidFill>
                   <a:srgbClr val="FFFFFF"/>
                 </a:solidFill>
@@ -3934,7 +3934,7 @@
               </a:rPr>
               <a:t>Аванс</a:t>
             </a:r>
-            <a:endParaRPr lang="en-US" sz="850" dirty="0"/>
+            <a:endParaRPr lang="en-US" sz="900" dirty="0"/>
           </a:p>
         </p:txBody>
       </p:sp>
@@ -3971,8 +3971,8 @@
         </p:nvSpPr>
         <p:spPr>
           <a:xfrm>
-            <a:off x="3813048" y="1417320"/>
-            <a:ext cx="822960" cy="566928"/>
+            <a:off x="3867912" y="1417320"/>
+            <a:ext cx="749808" cy="566928"/>
           </a:xfrm>
           <a:prstGeom prst="rect">
             <a:avLst/>
@@ -3988,7 +3988,7 @@
               <a:buNone/>
             </a:pPr>
             <a:r>
-              <a:rPr lang="en-US" sz="850" b="1" dirty="0">
+              <a:rPr lang="en-US" sz="900" b="1" dirty="0">
                 <a:solidFill>
                   <a:srgbClr val="FFFFFF"/>
                 </a:solidFill>
@@ -3998,7 +3998,7 @@
               </a:rPr>
               <a:t>Дизайн</a:t>
             </a:r>
-            <a:endParaRPr lang="en-US" sz="850" dirty="0"/>
+            <a:endParaRPr lang="en-US" sz="900" dirty="0"/>
           </a:p>
         </p:txBody>
       </p:sp>
@@ -4035,8 +4035,8 @@
         </p:nvSpPr>
         <p:spPr>
           <a:xfrm>
-            <a:off x="4882896" y="1417320"/>
-            <a:ext cx="822960" cy="566928"/>
+            <a:off x="4937760" y="1417320"/>
+            <a:ext cx="749808" cy="566928"/>
           </a:xfrm>
           <a:prstGeom prst="rect">
             <a:avLst/>
@@ -4052,7 +4052,7 @@
               <a:buNone/>
             </a:pPr>
             <a:r>
-              <a:rPr lang="en-US" sz="850" b="1" dirty="0">
+              <a:rPr lang="en-US" sz="750" b="1" dirty="0">
                 <a:solidFill>
                   <a:srgbClr val="FFFFFF"/>
                 </a:solidFill>
@@ -4062,7 +4062,7 @@
               </a:rPr>
               <a:t>Производство</a:t>
             </a:r>
-            <a:endParaRPr lang="en-US" sz="850" dirty="0"/>
+            <a:endParaRPr lang="en-US" sz="750" dirty="0"/>
           </a:p>
         </p:txBody>
       </p:sp>
@@ -4099,8 +4099,8 @@
         </p:nvSpPr>
         <p:spPr>
           <a:xfrm>
-            <a:off x="5952744" y="1417320"/>
-            <a:ext cx="822960" cy="566928"/>
+            <a:off x="6007608" y="1417320"/>
+            <a:ext cx="749808" cy="566928"/>
           </a:xfrm>
           <a:prstGeom prst="rect">
             <a:avLst/>
@@ -4116,7 +4116,7 @@
               <a:buNone/>
             </a:pPr>
             <a:r>
-              <a:rPr lang="en-US" sz="850" b="1" dirty="0">
+              <a:rPr lang="en-US" sz="900" b="1" dirty="0">
                 <a:solidFill>
                   <a:srgbClr val="FFFFFF"/>
                 </a:solidFill>
@@ -4126,7 +4126,7 @@
               </a:rPr>
               <a:t>Сдача</a:t>
             </a:r>
-            <a:endParaRPr lang="en-US" sz="850" dirty="0"/>
+            <a:endParaRPr lang="en-US" sz="900" dirty="0"/>
           </a:p>
         </p:txBody>
       </p:sp>
@@ -4163,8 +4163,8 @@
         </p:nvSpPr>
         <p:spPr>
           <a:xfrm>
-            <a:off x="7022592" y="1417320"/>
-            <a:ext cx="822960" cy="566928"/>
+            <a:off x="7077456" y="1417320"/>
+            <a:ext cx="749808" cy="566928"/>
           </a:xfrm>
           <a:prstGeom prst="rect">
             <a:avLst/>
@@ -4180,7 +4180,7 @@
               <a:buNone/>
             </a:pPr>
             <a:r>
-              <a:rPr lang="en-US" sz="850" b="1" dirty="0">
+              <a:rPr lang="en-US" sz="900" b="1" dirty="0">
                 <a:solidFill>
                   <a:srgbClr val="FFFFFF"/>
                 </a:solidFill>
@@ -4190,7 +4190,7 @@
               </a:rPr>
               <a:t>Оплата</a:t>
             </a:r>
-            <a:endParaRPr lang="en-US" sz="850" dirty="0"/>
+            <a:endParaRPr lang="en-US" sz="900" dirty="0"/>
           </a:p>
         </p:txBody>
       </p:sp>
@@ -4227,8 +4227,8 @@
         </p:nvSpPr>
         <p:spPr>
           <a:xfrm>
-            <a:off x="8092440" y="1417320"/>
-            <a:ext cx="822960" cy="566928"/>
+            <a:off x="8147304" y="1417320"/>
+            <a:ext cx="749808" cy="566928"/>
           </a:xfrm>
           <a:prstGeom prst="rect">
             <a:avLst/>
@@ -4244,7 +4244,7 @@
               <a:buNone/>
             </a:pPr>
             <a:r>
-              <a:rPr lang="en-US" sz="850" b="1" dirty="0">
+              <a:rPr lang="en-US" sz="900" b="1" dirty="0">
                 <a:solidFill>
                   <a:srgbClr val="FFFFFF"/>
                 </a:solidFill>
@@ -4254,7 +4254,7 @@
               </a:rPr>
               <a:t>Закрыт</a:t>
             </a:r>
-            <a:endParaRPr lang="en-US" sz="850" dirty="0"/>
+            <a:endParaRPr lang="en-US" sz="900" dirty="0"/>
           </a:p>
         </p:txBody>
       </p:sp>
